--- a/public/fun/cards/expert/expert-33.pptx
+++ b/public/fun/cards/expert/expert-33.pptx
@@ -3085,7 +3085,7 @@
     <p:bg>
       <p:bgPr>
         <a:solidFill>
-          <a:srgbClr val="213858"/>
+          <a:srgbClr val="00B86B"/>
         </a:solidFill>
         <a:effectLst/>
       </p:bgPr>
@@ -3099,20 +3099,22 @@
       <p:grpSpPr/>
       <p:sp>
         <p:nvSpPr>
-          <p:cNvPr id="2" name="Rectangle 1"/>
+          <p:cNvPr id="2" name="Rounded Rectangle 1"/>
           <p:cNvSpPr/>
           <p:nvPr/>
         </p:nvSpPr>
         <p:spPr>
           <a:xfrm>
-            <a:off x="0" y="0"/>
-            <a:ext cx="3240000" cy="720000"/>
+            <a:off x="252000" y="230400"/>
+            <a:ext cx="1007655" cy="180000"/>
           </a:xfrm>
-          <a:prstGeom prst="rect">
-            <a:avLst/>
+          <a:prstGeom prst="roundRect">
+            <a:avLst>
+              <a:gd name="adj" fmla="val 50000"/>
+            </a:avLst>
           </a:prstGeom>
           <a:solidFill>
-            <a:srgbClr val="D1DEF0"/>
+            <a:srgbClr val="12151C"/>
           </a:solidFill>
           <a:ln>
             <a:noFill/>
@@ -3126,69 +3128,126 @@
           </a:p>
         </p:txBody>
       </p:sp>
-      <p:cxnSp>
-        <p:nvCxnSpPr>
-          <p:cNvPr id="3" name="Connector 2"/>
-          <p:cNvCxnSpPr/>
+      <p:sp>
+        <p:nvSpPr>
+          <p:cNvPr id="3" name="텍스트"/>
+          <p:cNvSpPr txBox="1"/>
           <p:nvPr/>
-        </p:nvCxnSpPr>
+        </p:nvSpPr>
         <p:spPr>
-          <a:xfrm flipH="1">
-            <a:off x="2705760" y="270144"/>
-            <a:ext cx="89856" cy="89856"/>
+          <a:xfrm>
+            <a:off x="252000" y="230400"/>
+            <a:ext cx="1007655" cy="180000"/>
           </a:xfrm>
-          <a:prstGeom prst="line">
+          <a:prstGeom prst="rect">
             <a:avLst/>
           </a:prstGeom>
-          <a:ln w="27648">
-            <a:solidFill>
-              <a:srgbClr val="595959"/>
-            </a:solidFill>
-          </a:ln>
+          <a:noFill/>
         </p:spPr>
-      </p:cxnSp>
-      <p:cxnSp>
-        <p:nvCxnSpPr>
-          <p:cNvPr id="4" name="Connector 3"/>
-          <p:cNvCxnSpPr/>
+        <p:txBody>
+          <a:bodyPr wrap="square" lIns="0" rIns="0" tIns="0" bIns="0" anchor="ctr">
+            <a:spAutoFit/>
+          </a:bodyPr>
+          <a:lstStyle/>
+          <a:p>
+            <a:pPr algn="ctr">
+              <a:lnSpc>
+                <a:spcPts val="1160"/>
+              </a:lnSpc>
+            </a:pPr>
+            <a:r>
+              <a:rPr sz="800" b="1">
+                <a:solidFill>
+                  <a:srgbClr val="FFFFFF"/>
+                </a:solidFill>
+                <a:latin typeface="맑은 고딕"/>
+                <a:ea typeface="맑은 고딕"/>
+              </a:rPr>
+              <a:t>프리랜서 강사</a:t>
+            </a:r>
+          </a:p>
+        </p:txBody>
+      </p:sp>
+      <p:sp>
+        <p:nvSpPr>
+          <p:cNvPr id="4" name="텍스트"/>
+          <p:cNvSpPr txBox="1"/>
           <p:nvPr/>
-        </p:nvCxnSpPr>
+        </p:nvSpPr>
         <p:spPr>
           <a:xfrm>
-            <a:off x="2705760" y="360000"/>
-            <a:ext cx="89856" cy="89856"/>
+            <a:off x="252000" y="568800"/>
+            <a:ext cx="2520000" cy="396000"/>
           </a:xfrm>
-          <a:prstGeom prst="line">
+          <a:prstGeom prst="rect">
             <a:avLst/>
           </a:prstGeom>
-          <a:ln w="27648">
-            <a:solidFill>
-              <a:srgbClr val="595959"/>
-            </a:solidFill>
-          </a:ln>
+          <a:noFill/>
         </p:spPr>
-      </p:cxnSp>
-      <p:cxnSp>
-        <p:nvCxnSpPr>
-          <p:cNvPr id="5" name="Connector 4"/>
-          <p:cNvCxnSpPr/>
+        <p:txBody>
+          <a:bodyPr wrap="square" lIns="0" rIns="0" tIns="0" bIns="0" anchor="t">
+            <a:spAutoFit/>
+          </a:bodyPr>
+          <a:lstStyle/>
+          <a:p>
+            <a:pPr algn="l">
+              <a:lnSpc>
+                <a:spcPts val="3479"/>
+              </a:lnSpc>
+            </a:pPr>
+            <a:r>
+              <a:rPr sz="2400" b="1">
+                <a:solidFill>
+                  <a:srgbClr val="12151C"/>
+                </a:solidFill>
+                <a:latin typeface="맑은 고딕"/>
+                <a:ea typeface="맑은 고딕"/>
+              </a:rPr>
+              <a:t>표세진</a:t>
+            </a:r>
+          </a:p>
+        </p:txBody>
+      </p:sp>
+      <p:sp>
+        <p:nvSpPr>
+          <p:cNvPr id="5" name="텍스트"/>
+          <p:cNvSpPr txBox="1"/>
           <p:nvPr/>
-        </p:nvCxnSpPr>
+        </p:nvSpPr>
         <p:spPr>
           <a:xfrm>
-            <a:off x="2892384" y="270144"/>
-            <a:ext cx="89856" cy="89856"/>
+            <a:off x="252000" y="993600"/>
+            <a:ext cx="2160000" cy="152401"/>
           </a:xfrm>
-          <a:prstGeom prst="line">
+          <a:prstGeom prst="rect">
             <a:avLst/>
           </a:prstGeom>
-          <a:ln w="27648">
-            <a:solidFill>
-              <a:srgbClr val="595959"/>
-            </a:solidFill>
-          </a:ln>
+          <a:noFill/>
         </p:spPr>
-      </p:cxnSp>
+        <p:txBody>
+          <a:bodyPr wrap="square" lIns="0" rIns="0" tIns="0" bIns="0" anchor="t">
+            <a:spAutoFit/>
+          </a:bodyPr>
+          <a:lstStyle/>
+          <a:p>
+            <a:pPr algn="l">
+              <a:lnSpc>
+                <a:spcPts val="1160"/>
+              </a:lnSpc>
+            </a:pPr>
+            <a:r>
+              <a:rPr sz="800" b="0">
+                <a:solidFill>
+                  <a:srgbClr val="0E392D"/>
+                </a:solidFill>
+                <a:latin typeface="맑은 고딕"/>
+                <a:ea typeface="맑은 고딕"/>
+              </a:rPr>
+              <a:t>소속 · 브랜드</a:t>
+            </a:r>
+          </a:p>
+        </p:txBody>
+      </p:sp>
       <p:cxnSp>
         <p:nvCxnSpPr>
           <p:cNvPr id="6" name="Connector 5"/>
@@ -3196,51 +3255,30 @@
           <p:nvPr/>
         </p:nvCxnSpPr>
         <p:spPr>
-          <a:xfrm flipH="1">
-            <a:off x="2892384" y="360000"/>
-            <a:ext cx="89856" cy="89856"/>
+          <a:xfrm>
+            <a:off x="252000" y="1209600"/>
+            <a:ext cx="2736000" cy="0"/>
           </a:xfrm>
           <a:prstGeom prst="line">
             <a:avLst/>
           </a:prstGeom>
-          <a:ln w="27648">
+          <a:ln w="5760">
             <a:solidFill>
-              <a:srgbClr val="595959"/>
+              <a:srgbClr val="07774B"/>
             </a:solidFill>
           </a:ln>
         </p:spPr>
       </p:cxnSp>
-      <p:cxnSp>
-        <p:nvCxnSpPr>
-          <p:cNvPr id="7" name="Connector 6"/>
-          <p:cNvCxnSpPr/>
-          <p:nvPr/>
-        </p:nvCxnSpPr>
-        <p:spPr>
-          <a:xfrm flipH="1">
-            <a:off x="2816352" y="242496"/>
-            <a:ext cx="55296" cy="235008"/>
-          </a:xfrm>
-          <a:prstGeom prst="line">
-            <a:avLst/>
-          </a:prstGeom>
-          <a:ln w="24192">
-            <a:solidFill>
-              <a:srgbClr val="ACACAC"/>
-            </a:solidFill>
-          </a:ln>
-        </p:spPr>
-      </p:cxnSp>
-      <p:sp>
-        <p:nvSpPr>
-          <p:cNvPr id="8" name="텍스트"/>
+      <p:sp>
+        <p:nvSpPr>
+          <p:cNvPr id="7" name="텍스트"/>
           <p:cNvSpPr txBox="1"/>
           <p:nvPr/>
         </p:nvSpPr>
         <p:spPr>
           <a:xfrm>
-            <a:off x="230400" y="187200"/>
-            <a:ext cx="2160000" cy="305437"/>
+            <a:off x="252000" y="1299600"/>
+            <a:ext cx="331200" cy="99061"/>
           </a:xfrm>
           <a:prstGeom prst="rect">
             <a:avLst/>
@@ -3255,32 +3293,32 @@
           <a:p>
             <a:pPr algn="l">
               <a:lnSpc>
-                <a:spcPts val="2682"/>
+                <a:spcPts val="754"/>
               </a:lnSpc>
             </a:pPr>
             <a:r>
-              <a:rPr sz="1850" b="1" spc="50">
+              <a:rPr sz="520" b="1" spc="120">
                 <a:solidFill>
-                  <a:srgbClr val="595959"/>
+                  <a:srgbClr val="0E392D"/>
                 </a:solidFill>
                 <a:latin typeface="맑은 고딕"/>
                 <a:ea typeface="맑은 고딕"/>
               </a:rPr>
-              <a:t>표세진</a:t>
-            </a:r>
-          </a:p>
-        </p:txBody>
-      </p:sp>
-      <p:sp>
-        <p:nvSpPr>
-          <p:cNvPr id="9" name="텍스트"/>
+              <a:t>TEL</a:t>
+            </a:r>
+          </a:p>
+        </p:txBody>
+      </p:sp>
+      <p:sp>
+        <p:nvSpPr>
+          <p:cNvPr id="8" name="텍스트"/>
           <p:cNvSpPr txBox="1"/>
           <p:nvPr/>
         </p:nvSpPr>
         <p:spPr>
           <a:xfrm>
-            <a:off x="230400" y="475200"/>
-            <a:ext cx="2160000" cy="122400"/>
+            <a:off x="583200" y="1288800"/>
+            <a:ext cx="1512000" cy="129541"/>
           </a:xfrm>
           <a:prstGeom prst="rect">
             <a:avLst/>
@@ -3295,32 +3333,32 @@
           <a:p>
             <a:pPr algn="l">
               <a:lnSpc>
-                <a:spcPts val="1232"/>
+                <a:spcPts val="986"/>
               </a:lnSpc>
             </a:pPr>
             <a:r>
-              <a:rPr sz="850" b="1">
+              <a:rPr sz="680" b="0">
                 <a:solidFill>
-                  <a:srgbClr val="595959"/>
+                  <a:srgbClr val="12151C"/>
                 </a:solidFill>
                 <a:latin typeface="맑은 고딕"/>
                 <a:ea typeface="맑은 고딕"/>
               </a:rPr>
-              <a:t>프리랜서 강사</a:t>
-            </a:r>
-          </a:p>
-        </p:txBody>
-      </p:sp>
-      <p:sp>
-        <p:nvSpPr>
-          <p:cNvPr id="10" name="텍스트"/>
+              <a:t>010-1234-5678</a:t>
+            </a:r>
+          </a:p>
+        </p:txBody>
+      </p:sp>
+      <p:sp>
+        <p:nvSpPr>
+          <p:cNvPr id="9" name="텍스트"/>
           <p:cNvSpPr txBox="1"/>
           <p:nvPr/>
         </p:nvSpPr>
         <p:spPr>
           <a:xfrm>
-            <a:off x="230400" y="835200"/>
-            <a:ext cx="1800000" cy="100800"/>
+            <a:off x="252000" y="1429200"/>
+            <a:ext cx="331200" cy="99061"/>
           </a:xfrm>
           <a:prstGeom prst="rect">
             <a:avLst/>
@@ -3335,32 +3373,32 @@
           <a:p>
             <a:pPr algn="l">
               <a:lnSpc>
-                <a:spcPts val="1087"/>
+                <a:spcPts val="754"/>
               </a:lnSpc>
             </a:pPr>
             <a:r>
-              <a:rPr sz="750" b="1" spc="150">
+              <a:rPr sz="520" b="1" spc="120">
                 <a:solidFill>
-                  <a:srgbClr val="B1B9C5"/>
+                  <a:srgbClr val="0E392D"/>
                 </a:solidFill>
                 <a:latin typeface="맑은 고딕"/>
                 <a:ea typeface="맑은 고딕"/>
               </a:rPr>
-              <a:t>소속 · 브랜드</a:t>
-            </a:r>
-          </a:p>
-        </p:txBody>
-      </p:sp>
-      <p:sp>
-        <p:nvSpPr>
-          <p:cNvPr id="11" name="텍스트"/>
+              <a:t>MAIL</a:t>
+            </a:r>
+          </a:p>
+        </p:txBody>
+      </p:sp>
+      <p:sp>
+        <p:nvSpPr>
+          <p:cNvPr id="10" name="텍스트"/>
           <p:cNvSpPr txBox="1"/>
           <p:nvPr/>
         </p:nvSpPr>
         <p:spPr>
           <a:xfrm>
-            <a:off x="230400" y="1015200"/>
-            <a:ext cx="122400" cy="168911"/>
+            <a:off x="583200" y="1418400"/>
+            <a:ext cx="1512000" cy="129541"/>
           </a:xfrm>
           <a:prstGeom prst="rect">
             <a:avLst/>
@@ -3375,32 +3413,32 @@
           <a:p>
             <a:pPr algn="l">
               <a:lnSpc>
-                <a:spcPts val="1015"/>
+                <a:spcPts val="986"/>
               </a:lnSpc>
             </a:pPr>
             <a:r>
-              <a:rPr sz="700" b="1">
+              <a:rPr sz="680" b="0">
                 <a:solidFill>
-                  <a:srgbClr val="D1DEF0"/>
+                  <a:srgbClr val="12151C"/>
                 </a:solidFill>
                 <a:latin typeface="맑은 고딕"/>
                 <a:ea typeface="맑은 고딕"/>
               </a:rPr>
-              <a:t>T</a:t>
-            </a:r>
-          </a:p>
-        </p:txBody>
-      </p:sp>
-      <p:sp>
-        <p:nvSpPr>
-          <p:cNvPr id="12" name="텍스트"/>
+              <a:t>name@example.com</a:t>
+            </a:r>
+          </a:p>
+        </p:txBody>
+      </p:sp>
+      <p:sp>
+        <p:nvSpPr>
+          <p:cNvPr id="11" name="텍스트"/>
           <p:cNvSpPr txBox="1"/>
           <p:nvPr/>
         </p:nvSpPr>
         <p:spPr>
           <a:xfrm>
-            <a:off x="374400" y="1015200"/>
-            <a:ext cx="1872000" cy="168911"/>
+            <a:off x="252000" y="1558800"/>
+            <a:ext cx="331200" cy="99061"/>
           </a:xfrm>
           <a:prstGeom prst="rect">
             <a:avLst/>
@@ -3415,32 +3453,32 @@
           <a:p>
             <a:pPr algn="l">
               <a:lnSpc>
-                <a:spcPts val="1015"/>
+                <a:spcPts val="754"/>
               </a:lnSpc>
             </a:pPr>
             <a:r>
-              <a:rPr sz="700" b="0">
+              <a:rPr sz="520" b="1" spc="120">
                 <a:solidFill>
-                  <a:srgbClr val="FFFFFF"/>
+                  <a:srgbClr val="0E392D"/>
                 </a:solidFill>
                 <a:latin typeface="맑은 고딕"/>
                 <a:ea typeface="맑은 고딕"/>
               </a:rPr>
-              <a:t>010-1234-5678</a:t>
-            </a:r>
-          </a:p>
-        </p:txBody>
-      </p:sp>
-      <p:sp>
-        <p:nvSpPr>
-          <p:cNvPr id="13" name="텍스트"/>
+              <a:t>ADDR</a:t>
+            </a:r>
+          </a:p>
+        </p:txBody>
+      </p:sp>
+      <p:sp>
+        <p:nvSpPr>
+          <p:cNvPr id="12" name="텍스트"/>
           <p:cNvSpPr txBox="1"/>
           <p:nvPr/>
         </p:nvSpPr>
         <p:spPr>
           <a:xfrm>
-            <a:off x="230400" y="1184111"/>
-            <a:ext cx="122400" cy="168911"/>
+            <a:off x="583200" y="1548000"/>
+            <a:ext cx="1512000" cy="129541"/>
           </a:xfrm>
           <a:prstGeom prst="rect">
             <a:avLst/>
@@ -3455,133 +3493,13 @@
           <a:p>
             <a:pPr algn="l">
               <a:lnSpc>
-                <a:spcPts val="1015"/>
+                <a:spcPts val="986"/>
               </a:lnSpc>
             </a:pPr>
             <a:r>
-              <a:rPr sz="700" b="1">
+              <a:rPr sz="680" b="0">
                 <a:solidFill>
-                  <a:srgbClr val="D1DEF0"/>
-                </a:solidFill>
-                <a:latin typeface="맑은 고딕"/>
-                <a:ea typeface="맑은 고딕"/>
-              </a:rPr>
-              <a:t>E</a:t>
-            </a:r>
-          </a:p>
-        </p:txBody>
-      </p:sp>
-      <p:sp>
-        <p:nvSpPr>
-          <p:cNvPr id="14" name="텍스트"/>
-          <p:cNvSpPr txBox="1"/>
-          <p:nvPr/>
-        </p:nvSpPr>
-        <p:spPr>
-          <a:xfrm>
-            <a:off x="374400" y="1184111"/>
-            <a:ext cx="1872000" cy="168911"/>
-          </a:xfrm>
-          <a:prstGeom prst="rect">
-            <a:avLst/>
-          </a:prstGeom>
-          <a:noFill/>
-        </p:spPr>
-        <p:txBody>
-          <a:bodyPr wrap="square" lIns="0" rIns="0" tIns="0" bIns="0" anchor="t">
-            <a:spAutoFit/>
-          </a:bodyPr>
-          <a:lstStyle/>
-          <a:p>
-            <a:pPr algn="l">
-              <a:lnSpc>
-                <a:spcPts val="1015"/>
-              </a:lnSpc>
-            </a:pPr>
-            <a:r>
-              <a:rPr sz="700" b="0">
-                <a:solidFill>
-                  <a:srgbClr val="FFFFFF"/>
-                </a:solidFill>
-                <a:latin typeface="맑은 고딕"/>
-                <a:ea typeface="맑은 고딕"/>
-              </a:rPr>
-              <a:t>name@example.com</a:t>
-            </a:r>
-          </a:p>
-        </p:txBody>
-      </p:sp>
-      <p:sp>
-        <p:nvSpPr>
-          <p:cNvPr id="15" name="텍스트"/>
-          <p:cNvSpPr txBox="1"/>
-          <p:nvPr/>
-        </p:nvSpPr>
-        <p:spPr>
-          <a:xfrm>
-            <a:off x="230400" y="1353022"/>
-            <a:ext cx="122400" cy="168911"/>
-          </a:xfrm>
-          <a:prstGeom prst="rect">
-            <a:avLst/>
-          </a:prstGeom>
-          <a:noFill/>
-        </p:spPr>
-        <p:txBody>
-          <a:bodyPr wrap="square" lIns="0" rIns="0" tIns="0" bIns="0" anchor="t">
-            <a:spAutoFit/>
-          </a:bodyPr>
-          <a:lstStyle/>
-          <a:p>
-            <a:pPr algn="l">
-              <a:lnSpc>
-                <a:spcPts val="1015"/>
-              </a:lnSpc>
-            </a:pPr>
-            <a:r>
-              <a:rPr sz="700" b="1">
-                <a:solidFill>
-                  <a:srgbClr val="D1DEF0"/>
-                </a:solidFill>
-                <a:latin typeface="맑은 고딕"/>
-                <a:ea typeface="맑은 고딕"/>
-              </a:rPr>
-              <a:t>A</a:t>
-            </a:r>
-          </a:p>
-        </p:txBody>
-      </p:sp>
-      <p:sp>
-        <p:nvSpPr>
-          <p:cNvPr id="16" name="텍스트"/>
-          <p:cNvSpPr txBox="1"/>
-          <p:nvPr/>
-        </p:nvSpPr>
-        <p:spPr>
-          <a:xfrm>
-            <a:off x="374400" y="1353022"/>
-            <a:ext cx="1872000" cy="168911"/>
-          </a:xfrm>
-          <a:prstGeom prst="rect">
-            <a:avLst/>
-          </a:prstGeom>
-          <a:noFill/>
-        </p:spPr>
-        <p:txBody>
-          <a:bodyPr wrap="square" lIns="0" rIns="0" tIns="0" bIns="0" anchor="t">
-            <a:spAutoFit/>
-          </a:bodyPr>
-          <a:lstStyle/>
-          <a:p>
-            <a:pPr algn="l">
-              <a:lnSpc>
-                <a:spcPts val="1015"/>
-              </a:lnSpc>
-            </a:pPr>
-            <a:r>
-              <a:rPr sz="700" b="0">
-                <a:solidFill>
-                  <a:srgbClr val="FFFFFF"/>
+                  <a:srgbClr val="12151C"/>
                 </a:solidFill>
                 <a:latin typeface="맑은 고딕"/>
                 <a:ea typeface="맑은 고딕"/>
@@ -3605,7 +3523,7 @@
     <p:bg>
       <p:bgPr>
         <a:solidFill>
-          <a:srgbClr val="FBF8F2"/>
+          <a:srgbClr val="F3F4F6"/>
         </a:solidFill>
         <a:effectLst/>
       </p:bgPr>
@@ -3619,20 +3537,107 @@
       <p:grpSpPr/>
       <p:sp>
         <p:nvSpPr>
-          <p:cNvPr id="2" name="Rectangle 1"/>
+          <p:cNvPr id="2" name="Freeform 1"/>
           <p:cNvSpPr/>
           <p:nvPr/>
         </p:nvSpPr>
         <p:spPr>
           <a:xfrm>
             <a:off x="0" y="0"/>
-            <a:ext cx="273600" cy="1800000"/>
+            <a:ext cx="1080000" cy="1080000"/>
           </a:xfrm>
-          <a:prstGeom prst="rect">
+          <a:custGeom>
             <a:avLst/>
-          </a:prstGeom>
+            <a:gdLst/>
+            <a:ahLst/>
+            <a:cxnLst/>
+            <a:rect l="l" t="t" r="r" b="b"/>
+            <a:pathLst>
+              <a:path w="1080000" h="1080000">
+                <a:moveTo>
+                  <a:pt x="0" y="0"/>
+                </a:moveTo>
+                <a:lnTo>
+                  <a:pt x="1080000" y="0"/>
+                </a:lnTo>
+                <a:lnTo>
+                  <a:pt x="1077688" y="70635"/>
+                </a:lnTo>
+                <a:lnTo>
+                  <a:pt x="1070760" y="140968"/>
+                </a:lnTo>
+                <a:lnTo>
+                  <a:pt x="1059248" y="210698"/>
+                </a:lnTo>
+                <a:lnTo>
+                  <a:pt x="1043200" y="279525"/>
+                </a:lnTo>
+                <a:lnTo>
+                  <a:pt x="1022685" y="347155"/>
+                </a:lnTo>
+                <a:lnTo>
+                  <a:pt x="997790" y="413298"/>
+                </a:lnTo>
+                <a:lnTo>
+                  <a:pt x="968623" y="477672"/>
+                </a:lnTo>
+                <a:lnTo>
+                  <a:pt x="935307" y="540000"/>
+                </a:lnTo>
+                <a:lnTo>
+                  <a:pt x="897987" y="600016"/>
+                </a:lnTo>
+                <a:lnTo>
+                  <a:pt x="856822" y="657462"/>
+                </a:lnTo>
+                <a:lnTo>
+                  <a:pt x="811987" y="712093"/>
+                </a:lnTo>
+                <a:lnTo>
+                  <a:pt x="763675" y="763675"/>
+                </a:lnTo>
+                <a:lnTo>
+                  <a:pt x="712093" y="811987"/>
+                </a:lnTo>
+                <a:lnTo>
+                  <a:pt x="657462" y="856822"/>
+                </a:lnTo>
+                <a:lnTo>
+                  <a:pt x="600016" y="897987"/>
+                </a:lnTo>
+                <a:lnTo>
+                  <a:pt x="540000" y="935307"/>
+                </a:lnTo>
+                <a:lnTo>
+                  <a:pt x="477672" y="968623"/>
+                </a:lnTo>
+                <a:lnTo>
+                  <a:pt x="413298" y="997790"/>
+                </a:lnTo>
+                <a:lnTo>
+                  <a:pt x="347155" y="1022685"/>
+                </a:lnTo>
+                <a:lnTo>
+                  <a:pt x="279525" y="1043200"/>
+                </a:lnTo>
+                <a:lnTo>
+                  <a:pt x="210698" y="1059248"/>
+                </a:lnTo>
+                <a:lnTo>
+                  <a:pt x="140968" y="1070760"/>
+                </a:lnTo>
+                <a:lnTo>
+                  <a:pt x="70635" y="1077688"/>
+                </a:lnTo>
+                <a:lnTo>
+                  <a:pt x="0" y="1080000"/>
+                </a:lnTo>
+                <a:close/>
+              </a:path>
+            </a:pathLst>
+          </a:custGeom>
           <a:solidFill>
-            <a:srgbClr val="91423B"/>
+            <a:srgbClr val="00B86B"/>
           </a:solidFill>
           <a:ln>
             <a:noFill/>
@@ -3646,121 +3651,132 @@
           </a:p>
         </p:txBody>
       </p:sp>
-      <p:cxnSp>
-        <p:nvCxnSpPr>
-          <p:cNvPr id="3" name="Connector 2"/>
-          <p:cNvCxnSpPr/>
+      <p:sp>
+        <p:nvSpPr>
+          <p:cNvPr id="3" name="Freeform 2"/>
+          <p:cNvSpPr/>
           <p:nvPr/>
-        </p:nvCxnSpPr>
+        </p:nvSpPr>
         <p:spPr>
-          <a:xfrm flipH="1">
-            <a:off x="73440" y="196416"/>
-            <a:ext cx="41184" cy="41184"/>
+          <a:xfrm>
+            <a:off x="0" y="0"/>
+            <a:ext cx="684000" cy="684000"/>
           </a:xfrm>
-          <a:prstGeom prst="line">
+          <a:custGeom>
             <a:avLst/>
-          </a:prstGeom>
-          <a:ln w="12672">
-            <a:solidFill>
-              <a:srgbClr val="FFFFFF"/>
-            </a:solidFill>
+            <a:gdLst/>
+            <a:ahLst/>
+            <a:cxnLst/>
+            <a:rect l="l" t="t" r="r" b="b"/>
+            <a:pathLst>
+              <a:path w="684000" h="684000">
+                <a:moveTo>
+                  <a:pt x="0" y="0"/>
+                </a:moveTo>
+                <a:lnTo>
+                  <a:pt x="684000" y="0"/>
+                </a:lnTo>
+                <a:lnTo>
+                  <a:pt x="682536" y="44736"/>
+                </a:lnTo>
+                <a:lnTo>
+                  <a:pt x="678148" y="89280"/>
+                </a:lnTo>
+                <a:lnTo>
+                  <a:pt x="670857" y="133442"/>
+                </a:lnTo>
+                <a:lnTo>
+                  <a:pt x="660693" y="177032"/>
+                </a:lnTo>
+                <a:lnTo>
+                  <a:pt x="647700" y="219865"/>
+                </a:lnTo>
+                <a:lnTo>
+                  <a:pt x="631934" y="261755"/>
+                </a:lnTo>
+                <a:lnTo>
+                  <a:pt x="613461" y="302525"/>
+                </a:lnTo>
+                <a:lnTo>
+                  <a:pt x="592361" y="342000"/>
+                </a:lnTo>
+                <a:lnTo>
+                  <a:pt x="568725" y="380010"/>
+                </a:lnTo>
+                <a:lnTo>
+                  <a:pt x="542654" y="416393"/>
+                </a:lnTo>
+                <a:lnTo>
+                  <a:pt x="514258" y="450993"/>
+                </a:lnTo>
+                <a:lnTo>
+                  <a:pt x="483661" y="483661"/>
+                </a:lnTo>
+                <a:lnTo>
+                  <a:pt x="450993" y="514258"/>
+                </a:lnTo>
+                <a:lnTo>
+                  <a:pt x="416393" y="542654"/>
+                </a:lnTo>
+                <a:lnTo>
+                  <a:pt x="380010" y="568725"/>
+                </a:lnTo>
+                <a:lnTo>
+                  <a:pt x="342000" y="592361"/>
+                </a:lnTo>
+                <a:lnTo>
+                  <a:pt x="302525" y="613461"/>
+                </a:lnTo>
+                <a:lnTo>
+                  <a:pt x="261755" y="631934"/>
+                </a:lnTo>
+                <a:lnTo>
+                  <a:pt x="219865" y="647700"/>
+                </a:lnTo>
+                <a:lnTo>
+                  <a:pt x="177032" y="660693"/>
+                </a:lnTo>
+                <a:lnTo>
+                  <a:pt x="133442" y="670857"/>
+                </a:lnTo>
+                <a:lnTo>
+                  <a:pt x="89280" y="678148"/>
+                </a:lnTo>
+                <a:lnTo>
+                  <a:pt x="44736" y="682536"/>
+                </a:lnTo>
+                <a:lnTo>
+                  <a:pt x="0" y="684000"/>
+                </a:lnTo>
+                <a:close/>
+              </a:path>
+            </a:pathLst>
+          </a:custGeom>
+          <a:solidFill>
+            <a:srgbClr val="D1ECE3"/>
+          </a:solidFill>
+          <a:ln>
+            <a:noFill/>
           </a:ln>
         </p:spPr>
-      </p:cxnSp>
-      <p:cxnSp>
-        <p:nvCxnSpPr>
-          <p:cNvPr id="4" name="Connector 3"/>
-          <p:cNvCxnSpPr/>
+        <p:txBody>
+          <a:bodyPr rtlCol="0" anchor="ctr"/>
+          <a:lstStyle/>
+          <a:p>
+            <a:pPr algn="ctr"/>
+          </a:p>
+        </p:txBody>
+      </p:sp>
+      <p:sp>
+        <p:nvSpPr>
+          <p:cNvPr id="4" name="텍스트"/>
+          <p:cNvSpPr txBox="1"/>
           <p:nvPr/>
-        </p:nvCxnSpPr>
+        </p:nvSpPr>
         <p:spPr>
           <a:xfrm>
-            <a:off x="73440" y="237600"/>
-            <a:ext cx="41184" cy="41184"/>
-          </a:xfrm>
-          <a:prstGeom prst="line">
-            <a:avLst/>
-          </a:prstGeom>
-          <a:ln w="12672">
-            <a:solidFill>
-              <a:srgbClr val="FFFFFF"/>
-            </a:solidFill>
-          </a:ln>
-        </p:spPr>
-      </p:cxnSp>
-      <p:cxnSp>
-        <p:nvCxnSpPr>
-          <p:cNvPr id="5" name="Connector 4"/>
-          <p:cNvCxnSpPr/>
-          <p:nvPr/>
-        </p:nvCxnSpPr>
-        <p:spPr>
-          <a:xfrm>
-            <a:off x="158976" y="196416"/>
-            <a:ext cx="41184" cy="41184"/>
-          </a:xfrm>
-          <a:prstGeom prst="line">
-            <a:avLst/>
-          </a:prstGeom>
-          <a:ln w="12672">
-            <a:solidFill>
-              <a:srgbClr val="FFFFFF"/>
-            </a:solidFill>
-          </a:ln>
-        </p:spPr>
-      </p:cxnSp>
-      <p:cxnSp>
-        <p:nvCxnSpPr>
-          <p:cNvPr id="6" name="Connector 5"/>
-          <p:cNvCxnSpPr/>
-          <p:nvPr/>
-        </p:nvCxnSpPr>
-        <p:spPr>
-          <a:xfrm flipH="1">
-            <a:off x="158976" y="237600"/>
-            <a:ext cx="41184" cy="41184"/>
-          </a:xfrm>
-          <a:prstGeom prst="line">
-            <a:avLst/>
-          </a:prstGeom>
-          <a:ln w="12672">
-            <a:solidFill>
-              <a:srgbClr val="FFFFFF"/>
-            </a:solidFill>
-          </a:ln>
-        </p:spPr>
-      </p:cxnSp>
-      <p:cxnSp>
-        <p:nvCxnSpPr>
-          <p:cNvPr id="7" name="Connector 6"/>
-          <p:cNvCxnSpPr/>
-          <p:nvPr/>
-        </p:nvCxnSpPr>
-        <p:spPr>
-          <a:xfrm flipH="1">
-            <a:off x="124128" y="183744"/>
-            <a:ext cx="25344" cy="107712"/>
-          </a:xfrm>
-          <a:prstGeom prst="line">
-            <a:avLst/>
-          </a:prstGeom>
-          <a:ln w="11088">
-            <a:solidFill>
-              <a:srgbClr val="737373"/>
-            </a:solidFill>
-          </a:ln>
-        </p:spPr>
-      </p:cxnSp>
-      <p:sp>
-        <p:nvSpPr>
-          <p:cNvPr id="8" name="텍스트"/>
-          <p:cNvSpPr txBox="1"/>
-          <p:nvPr/>
-        </p:nvSpPr>
-        <p:spPr>
-          <a:xfrm>
-            <a:off x="504000" y="396000"/>
-            <a:ext cx="1800000" cy="720000"/>
+            <a:off x="1188000" y="1044000"/>
+            <a:ext cx="1800000" cy="432000"/>
           </a:xfrm>
           <a:prstGeom prst="rect">
             <a:avLst/>
@@ -3768,20 +3784,20 @@
           <a:noFill/>
         </p:spPr>
         <p:txBody>
-          <a:bodyPr wrap="square" lIns="0" rIns="0" tIns="0" bIns="0" anchor="ctr">
+          <a:bodyPr wrap="square" lIns="0" rIns="0" tIns="0" bIns="0" anchor="t">
             <a:spAutoFit/>
           </a:bodyPr>
           <a:lstStyle/>
           <a:p>
-            <a:pPr algn="l">
+            <a:pPr algn="r">
               <a:lnSpc>
-                <a:spcPts val="1667"/>
+                <a:spcPts val="1739"/>
               </a:lnSpc>
             </a:pPr>
             <a:r>
-              <a:rPr sz="1150" b="1">
+              <a:rPr sz="1200" b="1">
                 <a:solidFill>
-                  <a:srgbClr val="16263B"/>
+                  <a:srgbClr val="12151C"/>
                 </a:solidFill>
                 <a:latin typeface="맑은 고딕"/>
                 <a:ea typeface="맑은 고딕"/>
@@ -3790,15 +3806,15 @@
             </a:r>
           </a:p>
           <a:p>
-            <a:pPr algn="l">
+            <a:pPr algn="r">
               <a:lnSpc>
-                <a:spcPts val="1667"/>
+                <a:spcPts val="1739"/>
               </a:lnSpc>
             </a:pPr>
             <a:r>
-              <a:rPr sz="1150" b="1">
+              <a:rPr sz="1200" b="1">
                 <a:solidFill>
-                  <a:srgbClr val="16263B"/>
+                  <a:srgbClr val="12151C"/>
                 </a:solidFill>
                 <a:latin typeface="맑은 고딕"/>
                 <a:ea typeface="맑은 고딕"/>
@@ -3810,14 +3826,14 @@
       </p:sp>
       <p:sp>
         <p:nvSpPr>
-          <p:cNvPr id="9" name="텍스트"/>
+          <p:cNvPr id="5" name="텍스트"/>
           <p:cNvSpPr txBox="1"/>
           <p:nvPr/>
         </p:nvSpPr>
         <p:spPr>
           <a:xfrm>
-            <a:off x="504000" y="1260000"/>
-            <a:ext cx="1728000" cy="108000"/>
+            <a:off x="1188000" y="1526400"/>
+            <a:ext cx="1800000" cy="123826"/>
           </a:xfrm>
           <a:prstGeom prst="rect">
             <a:avLst/>
@@ -3830,90 +3846,20 @@
           </a:bodyPr>
           <a:lstStyle/>
           <a:p>
-            <a:pPr algn="l">
+            <a:pPr algn="r">
               <a:lnSpc>
-                <a:spcPts val="1087"/>
+                <a:spcPts val="942"/>
               </a:lnSpc>
             </a:pPr>
             <a:r>
-              <a:rPr sz="750" b="1" spc="200">
+              <a:rPr sz="650" b="1" spc="200">
                 <a:solidFill>
-                  <a:srgbClr val="66707B"/>
+                  <a:srgbClr val="6B7280"/>
                 </a:solidFill>
                 <a:latin typeface="맑은 고딕"/>
                 <a:ea typeface="맑은 고딕"/>
               </a:rPr>
               <a:t>소속 · 브랜드</a:t>
-            </a:r>
-          </a:p>
-        </p:txBody>
-      </p:sp>
-      <p:sp>
-        <p:nvSpPr>
-          <p:cNvPr id="10" name="Rectangle 9"/>
-          <p:cNvSpPr/>
-          <p:nvPr/>
-        </p:nvSpPr>
-        <p:spPr>
-          <a:xfrm>
-            <a:off x="2520000" y="216000"/>
-            <a:ext cx="468000" cy="468000"/>
-          </a:xfrm>
-          <a:prstGeom prst="rect">
-            <a:avLst/>
-          </a:prstGeom>
-          <a:noFill/>
-          <a:ln w="9000">
-            <a:solidFill>
-              <a:srgbClr val="91423B"/>
-            </a:solidFill>
-            <a:prstDash val="dash"/>
-          </a:ln>
-        </p:spPr>
-        <p:txBody>
-          <a:bodyPr rtlCol="0" anchor="ctr"/>
-          <a:lstStyle/>
-          <a:p>
-            <a:pPr algn="ctr"/>
-          </a:p>
-        </p:txBody>
-      </p:sp>
-      <p:sp>
-        <p:nvSpPr>
-          <p:cNvPr id="11" name="텍스트"/>
-          <p:cNvSpPr txBox="1"/>
-          <p:nvPr/>
-        </p:nvSpPr>
-        <p:spPr>
-          <a:xfrm>
-            <a:off x="2520000" y="216000"/>
-            <a:ext cx="468000" cy="468000"/>
-          </a:xfrm>
-          <a:prstGeom prst="rect">
-            <a:avLst/>
-          </a:prstGeom>
-          <a:noFill/>
-        </p:spPr>
-        <p:txBody>
-          <a:bodyPr wrap="square" lIns="0" rIns="0" tIns="0" bIns="0" anchor="ctr">
-            <a:spAutoFit/>
-          </a:bodyPr>
-          <a:lstStyle/>
-          <a:p>
-            <a:pPr algn="ctr">
-              <a:lnSpc>
-                <a:spcPts val="1305"/>
-              </a:lnSpc>
-            </a:pPr>
-            <a:r>
-              <a:rPr sz="900" b="1">
-                <a:solidFill>
-                  <a:srgbClr val="66707B"/>
-                </a:solidFill>
-                <a:latin typeface="맑은 고딕"/>
-                <a:ea typeface="맑은 고딕"/>
-              </a:rPr>
-              <a:t>QR</a:t>
             </a:r>
           </a:p>
         </p:txBody>

--- a/public/fun/cards/expert/expert-33.pptx
+++ b/public/fun/cards/expert/expert-33.pptx
@@ -3099,19 +3099,17 @@
       <p:grpSpPr/>
       <p:sp>
         <p:nvSpPr>
-          <p:cNvPr id="2" name="Rounded Rectangle 1"/>
+          <p:cNvPr id="2" name="Oval 1"/>
           <p:cNvSpPr/>
           <p:nvPr/>
         </p:nvSpPr>
         <p:spPr>
           <a:xfrm>
-            <a:off x="252000" y="230400"/>
-            <a:ext cx="1007655" cy="180000"/>
-          </a:xfrm>
-          <a:prstGeom prst="roundRect">
-            <a:avLst>
-              <a:gd name="adj" fmla="val 50000"/>
-            </a:avLst>
+            <a:off x="2658960" y="239760"/>
+            <a:ext cx="24480" cy="24480"/>
+          </a:xfrm>
+          <a:prstGeom prst="ellipse">
+            <a:avLst/>
           </a:prstGeom>
           <a:solidFill>
             <a:srgbClr val="12151C"/>
@@ -3130,14 +3128,596 @@
       </p:sp>
       <p:sp>
         <p:nvSpPr>
-          <p:cNvPr id="3" name="텍스트"/>
+          <p:cNvPr id="3" name="Oval 2"/>
+          <p:cNvSpPr/>
+          <p:nvPr/>
+        </p:nvSpPr>
+        <p:spPr>
+          <a:xfrm>
+            <a:off x="2658960" y="333360"/>
+            <a:ext cx="24480" cy="24480"/>
+          </a:xfrm>
+          <a:prstGeom prst="ellipse">
+            <a:avLst/>
+          </a:prstGeom>
+          <a:solidFill>
+            <a:srgbClr val="07774B"/>
+          </a:solidFill>
+          <a:ln>
+            <a:noFill/>
+          </a:ln>
+        </p:spPr>
+        <p:txBody>
+          <a:bodyPr rtlCol="0" anchor="ctr"/>
+          <a:lstStyle/>
+          <a:p>
+            <a:pPr algn="ctr"/>
+          </a:p>
+        </p:txBody>
+      </p:sp>
+      <p:sp>
+        <p:nvSpPr>
+          <p:cNvPr id="4" name="Oval 3"/>
+          <p:cNvSpPr/>
+          <p:nvPr/>
+        </p:nvSpPr>
+        <p:spPr>
+          <a:xfrm>
+            <a:off x="2658960" y="426960"/>
+            <a:ext cx="24480" cy="24480"/>
+          </a:xfrm>
+          <a:prstGeom prst="ellipse">
+            <a:avLst/>
+          </a:prstGeom>
+          <a:solidFill>
+            <a:srgbClr val="07774B"/>
+          </a:solidFill>
+          <a:ln>
+            <a:noFill/>
+          </a:ln>
+        </p:spPr>
+        <p:txBody>
+          <a:bodyPr rtlCol="0" anchor="ctr"/>
+          <a:lstStyle/>
+          <a:p>
+            <a:pPr algn="ctr"/>
+          </a:p>
+        </p:txBody>
+      </p:sp>
+      <p:sp>
+        <p:nvSpPr>
+          <p:cNvPr id="5" name="Oval 4"/>
+          <p:cNvSpPr/>
+          <p:nvPr/>
+        </p:nvSpPr>
+        <p:spPr>
+          <a:xfrm>
+            <a:off x="2658960" y="520560"/>
+            <a:ext cx="24480" cy="24480"/>
+          </a:xfrm>
+          <a:prstGeom prst="ellipse">
+            <a:avLst/>
+          </a:prstGeom>
+          <a:solidFill>
+            <a:srgbClr val="07774B"/>
+          </a:solidFill>
+          <a:ln>
+            <a:noFill/>
+          </a:ln>
+        </p:spPr>
+        <p:txBody>
+          <a:bodyPr rtlCol="0" anchor="ctr"/>
+          <a:lstStyle/>
+          <a:p>
+            <a:pPr algn="ctr"/>
+          </a:p>
+        </p:txBody>
+      </p:sp>
+      <p:sp>
+        <p:nvSpPr>
+          <p:cNvPr id="6" name="Oval 5"/>
+          <p:cNvSpPr/>
+          <p:nvPr/>
+        </p:nvSpPr>
+        <p:spPr>
+          <a:xfrm>
+            <a:off x="2752560" y="239760"/>
+            <a:ext cx="24480" cy="24480"/>
+          </a:xfrm>
+          <a:prstGeom prst="ellipse">
+            <a:avLst/>
+          </a:prstGeom>
+          <a:solidFill>
+            <a:srgbClr val="07774B"/>
+          </a:solidFill>
+          <a:ln>
+            <a:noFill/>
+          </a:ln>
+        </p:spPr>
+        <p:txBody>
+          <a:bodyPr rtlCol="0" anchor="ctr"/>
+          <a:lstStyle/>
+          <a:p>
+            <a:pPr algn="ctr"/>
+          </a:p>
+        </p:txBody>
+      </p:sp>
+      <p:sp>
+        <p:nvSpPr>
+          <p:cNvPr id="7" name="Oval 6"/>
+          <p:cNvSpPr/>
+          <p:nvPr/>
+        </p:nvSpPr>
+        <p:spPr>
+          <a:xfrm>
+            <a:off x="2752560" y="333360"/>
+            <a:ext cx="24480" cy="24480"/>
+          </a:xfrm>
+          <a:prstGeom prst="ellipse">
+            <a:avLst/>
+          </a:prstGeom>
+          <a:solidFill>
+            <a:srgbClr val="07774B"/>
+          </a:solidFill>
+          <a:ln>
+            <a:noFill/>
+          </a:ln>
+        </p:spPr>
+        <p:txBody>
+          <a:bodyPr rtlCol="0" anchor="ctr"/>
+          <a:lstStyle/>
+          <a:p>
+            <a:pPr algn="ctr"/>
+          </a:p>
+        </p:txBody>
+      </p:sp>
+      <p:sp>
+        <p:nvSpPr>
+          <p:cNvPr id="8" name="Oval 7"/>
+          <p:cNvSpPr/>
+          <p:nvPr/>
+        </p:nvSpPr>
+        <p:spPr>
+          <a:xfrm>
+            <a:off x="2752560" y="426960"/>
+            <a:ext cx="24480" cy="24480"/>
+          </a:xfrm>
+          <a:prstGeom prst="ellipse">
+            <a:avLst/>
+          </a:prstGeom>
+          <a:solidFill>
+            <a:srgbClr val="07774B"/>
+          </a:solidFill>
+          <a:ln>
+            <a:noFill/>
+          </a:ln>
+        </p:spPr>
+        <p:txBody>
+          <a:bodyPr rtlCol="0" anchor="ctr"/>
+          <a:lstStyle/>
+          <a:p>
+            <a:pPr algn="ctr"/>
+          </a:p>
+        </p:txBody>
+      </p:sp>
+      <p:sp>
+        <p:nvSpPr>
+          <p:cNvPr id="9" name="Oval 8"/>
+          <p:cNvSpPr/>
+          <p:nvPr/>
+        </p:nvSpPr>
+        <p:spPr>
+          <a:xfrm>
+            <a:off x="2752560" y="520560"/>
+            <a:ext cx="24480" cy="24480"/>
+          </a:xfrm>
+          <a:prstGeom prst="ellipse">
+            <a:avLst/>
+          </a:prstGeom>
+          <a:solidFill>
+            <a:srgbClr val="12151C"/>
+          </a:solidFill>
+          <a:ln>
+            <a:noFill/>
+          </a:ln>
+        </p:spPr>
+        <p:txBody>
+          <a:bodyPr rtlCol="0" anchor="ctr"/>
+          <a:lstStyle/>
+          <a:p>
+            <a:pPr algn="ctr"/>
+          </a:p>
+        </p:txBody>
+      </p:sp>
+      <p:sp>
+        <p:nvSpPr>
+          <p:cNvPr id="10" name="Oval 9"/>
+          <p:cNvSpPr/>
+          <p:nvPr/>
+        </p:nvSpPr>
+        <p:spPr>
+          <a:xfrm>
+            <a:off x="2846160" y="239760"/>
+            <a:ext cx="24480" cy="24480"/>
+          </a:xfrm>
+          <a:prstGeom prst="ellipse">
+            <a:avLst/>
+          </a:prstGeom>
+          <a:solidFill>
+            <a:srgbClr val="07774B"/>
+          </a:solidFill>
+          <a:ln>
+            <a:noFill/>
+          </a:ln>
+        </p:spPr>
+        <p:txBody>
+          <a:bodyPr rtlCol="0" anchor="ctr"/>
+          <a:lstStyle/>
+          <a:p>
+            <a:pPr algn="ctr"/>
+          </a:p>
+        </p:txBody>
+      </p:sp>
+      <p:sp>
+        <p:nvSpPr>
+          <p:cNvPr id="11" name="Oval 10"/>
+          <p:cNvSpPr/>
+          <p:nvPr/>
+        </p:nvSpPr>
+        <p:spPr>
+          <a:xfrm>
+            <a:off x="2846160" y="333360"/>
+            <a:ext cx="24480" cy="24480"/>
+          </a:xfrm>
+          <a:prstGeom prst="ellipse">
+            <a:avLst/>
+          </a:prstGeom>
+          <a:solidFill>
+            <a:srgbClr val="07774B"/>
+          </a:solidFill>
+          <a:ln>
+            <a:noFill/>
+          </a:ln>
+        </p:spPr>
+        <p:txBody>
+          <a:bodyPr rtlCol="0" anchor="ctr"/>
+          <a:lstStyle/>
+          <a:p>
+            <a:pPr algn="ctr"/>
+          </a:p>
+        </p:txBody>
+      </p:sp>
+      <p:sp>
+        <p:nvSpPr>
+          <p:cNvPr id="12" name="Oval 11"/>
+          <p:cNvSpPr/>
+          <p:nvPr/>
+        </p:nvSpPr>
+        <p:spPr>
+          <a:xfrm>
+            <a:off x="2846160" y="426960"/>
+            <a:ext cx="24480" cy="24480"/>
+          </a:xfrm>
+          <a:prstGeom prst="ellipse">
+            <a:avLst/>
+          </a:prstGeom>
+          <a:solidFill>
+            <a:srgbClr val="12151C"/>
+          </a:solidFill>
+          <a:ln>
+            <a:noFill/>
+          </a:ln>
+        </p:spPr>
+        <p:txBody>
+          <a:bodyPr rtlCol="0" anchor="ctr"/>
+          <a:lstStyle/>
+          <a:p>
+            <a:pPr algn="ctr"/>
+          </a:p>
+        </p:txBody>
+      </p:sp>
+      <p:sp>
+        <p:nvSpPr>
+          <p:cNvPr id="13" name="Oval 12"/>
+          <p:cNvSpPr/>
+          <p:nvPr/>
+        </p:nvSpPr>
+        <p:spPr>
+          <a:xfrm>
+            <a:off x="2846160" y="520560"/>
+            <a:ext cx="24480" cy="24480"/>
+          </a:xfrm>
+          <a:prstGeom prst="ellipse">
+            <a:avLst/>
+          </a:prstGeom>
+          <a:solidFill>
+            <a:srgbClr val="07774B"/>
+          </a:solidFill>
+          <a:ln>
+            <a:noFill/>
+          </a:ln>
+        </p:spPr>
+        <p:txBody>
+          <a:bodyPr rtlCol="0" anchor="ctr"/>
+          <a:lstStyle/>
+          <a:p>
+            <a:pPr algn="ctr"/>
+          </a:p>
+        </p:txBody>
+      </p:sp>
+      <p:sp>
+        <p:nvSpPr>
+          <p:cNvPr id="14" name="Oval 13"/>
+          <p:cNvSpPr/>
+          <p:nvPr/>
+        </p:nvSpPr>
+        <p:spPr>
+          <a:xfrm>
+            <a:off x="2939760" y="239760"/>
+            <a:ext cx="24480" cy="24480"/>
+          </a:xfrm>
+          <a:prstGeom prst="ellipse">
+            <a:avLst/>
+          </a:prstGeom>
+          <a:solidFill>
+            <a:srgbClr val="07774B"/>
+          </a:solidFill>
+          <a:ln>
+            <a:noFill/>
+          </a:ln>
+        </p:spPr>
+        <p:txBody>
+          <a:bodyPr rtlCol="0" anchor="ctr"/>
+          <a:lstStyle/>
+          <a:p>
+            <a:pPr algn="ctr"/>
+          </a:p>
+        </p:txBody>
+      </p:sp>
+      <p:sp>
+        <p:nvSpPr>
+          <p:cNvPr id="15" name="Oval 14"/>
+          <p:cNvSpPr/>
+          <p:nvPr/>
+        </p:nvSpPr>
+        <p:spPr>
+          <a:xfrm>
+            <a:off x="2939760" y="333360"/>
+            <a:ext cx="24480" cy="24480"/>
+          </a:xfrm>
+          <a:prstGeom prst="ellipse">
+            <a:avLst/>
+          </a:prstGeom>
+          <a:solidFill>
+            <a:srgbClr val="12151C"/>
+          </a:solidFill>
+          <a:ln>
+            <a:noFill/>
+          </a:ln>
+        </p:spPr>
+        <p:txBody>
+          <a:bodyPr rtlCol="0" anchor="ctr"/>
+          <a:lstStyle/>
+          <a:p>
+            <a:pPr algn="ctr"/>
+          </a:p>
+        </p:txBody>
+      </p:sp>
+      <p:sp>
+        <p:nvSpPr>
+          <p:cNvPr id="16" name="Oval 15"/>
+          <p:cNvSpPr/>
+          <p:nvPr/>
+        </p:nvSpPr>
+        <p:spPr>
+          <a:xfrm>
+            <a:off x="2939760" y="426960"/>
+            <a:ext cx="24480" cy="24480"/>
+          </a:xfrm>
+          <a:prstGeom prst="ellipse">
+            <a:avLst/>
+          </a:prstGeom>
+          <a:solidFill>
+            <a:srgbClr val="07774B"/>
+          </a:solidFill>
+          <a:ln>
+            <a:noFill/>
+          </a:ln>
+        </p:spPr>
+        <p:txBody>
+          <a:bodyPr rtlCol="0" anchor="ctr"/>
+          <a:lstStyle/>
+          <a:p>
+            <a:pPr algn="ctr"/>
+          </a:p>
+        </p:txBody>
+      </p:sp>
+      <p:sp>
+        <p:nvSpPr>
+          <p:cNvPr id="17" name="Oval 16"/>
+          <p:cNvSpPr/>
+          <p:nvPr/>
+        </p:nvSpPr>
+        <p:spPr>
+          <a:xfrm>
+            <a:off x="2939760" y="520560"/>
+            <a:ext cx="24480" cy="24480"/>
+          </a:xfrm>
+          <a:prstGeom prst="ellipse">
+            <a:avLst/>
+          </a:prstGeom>
+          <a:solidFill>
+            <a:srgbClr val="07774B"/>
+          </a:solidFill>
+          <a:ln>
+            <a:noFill/>
+          </a:ln>
+        </p:spPr>
+        <p:txBody>
+          <a:bodyPr rtlCol="0" anchor="ctr"/>
+          <a:lstStyle/>
+          <a:p>
+            <a:pPr algn="ctr"/>
+          </a:p>
+        </p:txBody>
+      </p:sp>
+      <p:sp>
+        <p:nvSpPr>
+          <p:cNvPr id="18" name="Oval 17"/>
+          <p:cNvSpPr/>
+          <p:nvPr/>
+        </p:nvSpPr>
+        <p:spPr>
+          <a:xfrm>
+            <a:off x="3033360" y="239760"/>
+            <a:ext cx="24480" cy="24480"/>
+          </a:xfrm>
+          <a:prstGeom prst="ellipse">
+            <a:avLst/>
+          </a:prstGeom>
+          <a:solidFill>
+            <a:srgbClr val="12151C"/>
+          </a:solidFill>
+          <a:ln>
+            <a:noFill/>
+          </a:ln>
+        </p:spPr>
+        <p:txBody>
+          <a:bodyPr rtlCol="0" anchor="ctr"/>
+          <a:lstStyle/>
+          <a:p>
+            <a:pPr algn="ctr"/>
+          </a:p>
+        </p:txBody>
+      </p:sp>
+      <p:sp>
+        <p:nvSpPr>
+          <p:cNvPr id="19" name="Oval 18"/>
+          <p:cNvSpPr/>
+          <p:nvPr/>
+        </p:nvSpPr>
+        <p:spPr>
+          <a:xfrm>
+            <a:off x="3033360" y="333360"/>
+            <a:ext cx="24480" cy="24480"/>
+          </a:xfrm>
+          <a:prstGeom prst="ellipse">
+            <a:avLst/>
+          </a:prstGeom>
+          <a:solidFill>
+            <a:srgbClr val="07774B"/>
+          </a:solidFill>
+          <a:ln>
+            <a:noFill/>
+          </a:ln>
+        </p:spPr>
+        <p:txBody>
+          <a:bodyPr rtlCol="0" anchor="ctr"/>
+          <a:lstStyle/>
+          <a:p>
+            <a:pPr algn="ctr"/>
+          </a:p>
+        </p:txBody>
+      </p:sp>
+      <p:sp>
+        <p:nvSpPr>
+          <p:cNvPr id="20" name="Oval 19"/>
+          <p:cNvSpPr/>
+          <p:nvPr/>
+        </p:nvSpPr>
+        <p:spPr>
+          <a:xfrm>
+            <a:off x="3033360" y="426960"/>
+            <a:ext cx="24480" cy="24480"/>
+          </a:xfrm>
+          <a:prstGeom prst="ellipse">
+            <a:avLst/>
+          </a:prstGeom>
+          <a:solidFill>
+            <a:srgbClr val="07774B"/>
+          </a:solidFill>
+          <a:ln>
+            <a:noFill/>
+          </a:ln>
+        </p:spPr>
+        <p:txBody>
+          <a:bodyPr rtlCol="0" anchor="ctr"/>
+          <a:lstStyle/>
+          <a:p>
+            <a:pPr algn="ctr"/>
+          </a:p>
+        </p:txBody>
+      </p:sp>
+      <p:sp>
+        <p:nvSpPr>
+          <p:cNvPr id="21" name="Oval 20"/>
+          <p:cNvSpPr/>
+          <p:nvPr/>
+        </p:nvSpPr>
+        <p:spPr>
+          <a:xfrm>
+            <a:off x="3033360" y="520560"/>
+            <a:ext cx="24480" cy="24480"/>
+          </a:xfrm>
+          <a:prstGeom prst="ellipse">
+            <a:avLst/>
+          </a:prstGeom>
+          <a:solidFill>
+            <a:srgbClr val="07774B"/>
+          </a:solidFill>
+          <a:ln>
+            <a:noFill/>
+          </a:ln>
+        </p:spPr>
+        <p:txBody>
+          <a:bodyPr rtlCol="0" anchor="ctr"/>
+          <a:lstStyle/>
+          <a:p>
+            <a:pPr algn="ctr"/>
+          </a:p>
+        </p:txBody>
+      </p:sp>
+      <p:sp>
+        <p:nvSpPr>
+          <p:cNvPr id="22" name="Rounded Rectangle 21"/>
+          <p:cNvSpPr/>
+          <p:nvPr/>
+        </p:nvSpPr>
+        <p:spPr>
+          <a:xfrm>
+            <a:off x="252000" y="237600"/>
+            <a:ext cx="888704" cy="165600"/>
+          </a:xfrm>
+          <a:prstGeom prst="roundRect">
+            <a:avLst>
+              <a:gd name="adj" fmla="val 50000"/>
+            </a:avLst>
+          </a:prstGeom>
+          <a:noFill/>
+          <a:ln w="5760">
+            <a:solidFill>
+              <a:srgbClr val="12151C"/>
+            </a:solidFill>
+          </a:ln>
+        </p:spPr>
+        <p:txBody>
+          <a:bodyPr rtlCol="0" anchor="ctr"/>
+          <a:lstStyle/>
+          <a:p>
+            <a:pPr algn="ctr"/>
+          </a:p>
+        </p:txBody>
+      </p:sp>
+      <p:sp>
+        <p:nvSpPr>
+          <p:cNvPr id="23" name="텍스트"/>
           <p:cNvSpPr txBox="1"/>
           <p:nvPr/>
         </p:nvSpPr>
         <p:spPr>
           <a:xfrm>
-            <a:off x="252000" y="230400"/>
-            <a:ext cx="1007655" cy="180000"/>
+            <a:off x="252000" y="237600"/>
+            <a:ext cx="888704" cy="165600"/>
           </a:xfrm>
           <a:prstGeom prst="rect">
             <a:avLst/>
@@ -3152,13 +3732,13 @@
           <a:p>
             <a:pPr algn="ctr">
               <a:lnSpc>
-                <a:spcPts val="1160"/>
+                <a:spcPts val="956"/>
               </a:lnSpc>
             </a:pPr>
             <a:r>
-              <a:rPr sz="800" b="1">
+              <a:rPr sz="660" b="1" spc="80">
                 <a:solidFill>
-                  <a:srgbClr val="FFFFFF"/>
+                  <a:srgbClr val="12151C"/>
                 </a:solidFill>
                 <a:latin typeface="맑은 고딕"/>
                 <a:ea typeface="맑은 고딕"/>
@@ -3170,14 +3750,14 @@
       </p:sp>
       <p:sp>
         <p:nvSpPr>
-          <p:cNvPr id="4" name="텍스트"/>
+          <p:cNvPr id="24" name="텍스트"/>
           <p:cNvSpPr txBox="1"/>
           <p:nvPr/>
         </p:nvSpPr>
         <p:spPr>
           <a:xfrm>
-            <a:off x="252000" y="568800"/>
-            <a:ext cx="2520000" cy="396000"/>
+            <a:off x="252000" y="583200"/>
+            <a:ext cx="2160000" cy="237600"/>
           </a:xfrm>
           <a:prstGeom prst="rect">
             <a:avLst/>
@@ -3192,11 +3772,11 @@
           <a:p>
             <a:pPr algn="l">
               <a:lnSpc>
-                <a:spcPts val="3479"/>
+                <a:spcPts val="1957"/>
               </a:lnSpc>
             </a:pPr>
             <a:r>
-              <a:rPr sz="2400" b="1">
+              <a:rPr sz="1350" b="1" spc="120">
                 <a:solidFill>
                   <a:srgbClr val="12151C"/>
                 </a:solidFill>
@@ -3210,14 +3790,14 @@
       </p:sp>
       <p:sp>
         <p:nvSpPr>
-          <p:cNvPr id="5" name="텍스트"/>
+          <p:cNvPr id="25" name="텍스트"/>
           <p:cNvSpPr txBox="1"/>
           <p:nvPr/>
         </p:nvSpPr>
         <p:spPr>
           <a:xfrm>
-            <a:off x="252000" y="993600"/>
-            <a:ext cx="2160000" cy="152401"/>
+            <a:off x="252000" y="878400"/>
+            <a:ext cx="1800000" cy="123826"/>
           </a:xfrm>
           <a:prstGeom prst="rect">
             <a:avLst/>
@@ -3232,11 +3812,11 @@
           <a:p>
             <a:pPr algn="l">
               <a:lnSpc>
-                <a:spcPts val="1160"/>
+                <a:spcPts val="942"/>
               </a:lnSpc>
             </a:pPr>
             <a:r>
-              <a:rPr sz="800" b="0">
+              <a:rPr sz="650" b="1" spc="220">
                 <a:solidFill>
                   <a:srgbClr val="0E392D"/>
                 </a:solidFill>
@@ -3250,19 +3830,19 @@
       </p:sp>
       <p:cxnSp>
         <p:nvCxnSpPr>
-          <p:cNvPr id="6" name="Connector 5"/>
+          <p:cNvPr id="26" name="Connector 25"/>
           <p:cNvCxnSpPr/>
           <p:nvPr/>
         </p:nvCxnSpPr>
         <p:spPr>
           <a:xfrm>
-            <a:off x="252000" y="1209600"/>
+            <a:off x="252000" y="1144800"/>
             <a:ext cx="2736000" cy="0"/>
           </a:xfrm>
           <a:prstGeom prst="line">
             <a:avLst/>
           </a:prstGeom>
-          <a:ln w="5760">
+          <a:ln w="3600">
             <a:solidFill>
               <a:srgbClr val="07774B"/>
             </a:solidFill>
@@ -3271,14 +3851,14 @@
       </p:cxnSp>
       <p:sp>
         <p:nvSpPr>
-          <p:cNvPr id="7" name="텍스트"/>
+          <p:cNvPr id="27" name="텍스트"/>
           <p:cNvSpPr txBox="1"/>
           <p:nvPr/>
         </p:nvSpPr>
         <p:spPr>
           <a:xfrm>
-            <a:off x="252000" y="1299600"/>
-            <a:ext cx="331200" cy="99061"/>
+            <a:off x="252000" y="1242000"/>
+            <a:ext cx="331200" cy="91441"/>
           </a:xfrm>
           <a:prstGeom prst="rect">
             <a:avLst/>
@@ -3293,11 +3873,11 @@
           <a:p>
             <a:pPr algn="l">
               <a:lnSpc>
-                <a:spcPts val="754"/>
+                <a:spcPts val="696"/>
               </a:lnSpc>
             </a:pPr>
             <a:r>
-              <a:rPr sz="520" b="1" spc="120">
+              <a:rPr sz="480" b="1" spc="140">
                 <a:solidFill>
                   <a:srgbClr val="0E392D"/>
                 </a:solidFill>
@@ -3311,14 +3891,14 @@
       </p:sp>
       <p:sp>
         <p:nvSpPr>
-          <p:cNvPr id="8" name="텍스트"/>
+          <p:cNvPr id="28" name="텍스트"/>
           <p:cNvSpPr txBox="1"/>
           <p:nvPr/>
         </p:nvSpPr>
         <p:spPr>
           <a:xfrm>
-            <a:off x="583200" y="1288800"/>
-            <a:ext cx="1512000" cy="129541"/>
+            <a:off x="583200" y="1231200"/>
+            <a:ext cx="1512000" cy="123826"/>
           </a:xfrm>
           <a:prstGeom prst="rect">
             <a:avLst/>
@@ -3333,11 +3913,11 @@
           <a:p>
             <a:pPr algn="l">
               <a:lnSpc>
-                <a:spcPts val="986"/>
+                <a:spcPts val="942"/>
               </a:lnSpc>
             </a:pPr>
             <a:r>
-              <a:rPr sz="680" b="0">
+              <a:rPr sz="650" b="0">
                 <a:solidFill>
                   <a:srgbClr val="12151C"/>
                 </a:solidFill>
@@ -3351,14 +3931,14 @@
       </p:sp>
       <p:sp>
         <p:nvSpPr>
-          <p:cNvPr id="9" name="텍스트"/>
+          <p:cNvPr id="29" name="텍스트"/>
           <p:cNvSpPr txBox="1"/>
           <p:nvPr/>
         </p:nvSpPr>
         <p:spPr>
           <a:xfrm>
-            <a:off x="252000" y="1429200"/>
-            <a:ext cx="331200" cy="99061"/>
+            <a:off x="252000" y="1371600"/>
+            <a:ext cx="331200" cy="91441"/>
           </a:xfrm>
           <a:prstGeom prst="rect">
             <a:avLst/>
@@ -3373,11 +3953,11 @@
           <a:p>
             <a:pPr algn="l">
               <a:lnSpc>
-                <a:spcPts val="754"/>
+                <a:spcPts val="696"/>
               </a:lnSpc>
             </a:pPr>
             <a:r>
-              <a:rPr sz="520" b="1" spc="120">
+              <a:rPr sz="480" b="1" spc="140">
                 <a:solidFill>
                   <a:srgbClr val="0E392D"/>
                 </a:solidFill>
@@ -3391,14 +3971,14 @@
       </p:sp>
       <p:sp>
         <p:nvSpPr>
-          <p:cNvPr id="10" name="텍스트"/>
+          <p:cNvPr id="30" name="텍스트"/>
           <p:cNvSpPr txBox="1"/>
           <p:nvPr/>
         </p:nvSpPr>
         <p:spPr>
           <a:xfrm>
-            <a:off x="583200" y="1418400"/>
-            <a:ext cx="1512000" cy="129541"/>
+            <a:off x="583200" y="1360800"/>
+            <a:ext cx="1512000" cy="123826"/>
           </a:xfrm>
           <a:prstGeom prst="rect">
             <a:avLst/>
@@ -3413,11 +3993,11 @@
           <a:p>
             <a:pPr algn="l">
               <a:lnSpc>
-                <a:spcPts val="986"/>
+                <a:spcPts val="942"/>
               </a:lnSpc>
             </a:pPr>
             <a:r>
-              <a:rPr sz="680" b="0">
+              <a:rPr sz="650" b="0">
                 <a:solidFill>
                   <a:srgbClr val="12151C"/>
                 </a:solidFill>
@@ -3431,14 +4011,14 @@
       </p:sp>
       <p:sp>
         <p:nvSpPr>
-          <p:cNvPr id="11" name="텍스트"/>
+          <p:cNvPr id="31" name="텍스트"/>
           <p:cNvSpPr txBox="1"/>
           <p:nvPr/>
         </p:nvSpPr>
         <p:spPr>
           <a:xfrm>
-            <a:off x="252000" y="1558800"/>
-            <a:ext cx="331200" cy="99061"/>
+            <a:off x="252000" y="1501200"/>
+            <a:ext cx="331200" cy="91441"/>
           </a:xfrm>
           <a:prstGeom prst="rect">
             <a:avLst/>
@@ -3453,11 +4033,11 @@
           <a:p>
             <a:pPr algn="l">
               <a:lnSpc>
-                <a:spcPts val="754"/>
+                <a:spcPts val="696"/>
               </a:lnSpc>
             </a:pPr>
             <a:r>
-              <a:rPr sz="520" b="1" spc="120">
+              <a:rPr sz="480" b="1" spc="140">
                 <a:solidFill>
                   <a:srgbClr val="0E392D"/>
                 </a:solidFill>
@@ -3471,14 +4051,14 @@
       </p:sp>
       <p:sp>
         <p:nvSpPr>
-          <p:cNvPr id="12" name="텍스트"/>
+          <p:cNvPr id="32" name="텍스트"/>
           <p:cNvSpPr txBox="1"/>
           <p:nvPr/>
         </p:nvSpPr>
         <p:spPr>
           <a:xfrm>
-            <a:off x="583200" y="1548000"/>
-            <a:ext cx="1512000" cy="129541"/>
+            <a:off x="583200" y="1490400"/>
+            <a:ext cx="1512000" cy="123826"/>
           </a:xfrm>
           <a:prstGeom prst="rect">
             <a:avLst/>
@@ -3493,11 +4073,11 @@
           <a:p>
             <a:pPr algn="l">
               <a:lnSpc>
-                <a:spcPts val="986"/>
+                <a:spcPts val="942"/>
               </a:lnSpc>
             </a:pPr>
             <a:r>
-              <a:rPr sz="680" b="0">
+              <a:rPr sz="650" b="0">
                 <a:solidFill>
                   <a:srgbClr val="12151C"/>
                 </a:solidFill>
@@ -3509,6 +4089,48 @@
           </a:p>
         </p:txBody>
       </p:sp>
+      <p:cxnSp>
+        <p:nvCxnSpPr>
+          <p:cNvPr id="33" name="Connector 32"/>
+          <p:cNvCxnSpPr/>
+          <p:nvPr/>
+        </p:nvCxnSpPr>
+        <p:spPr>
+          <a:xfrm>
+            <a:off x="2955600" y="1584000"/>
+            <a:ext cx="64800" cy="0"/>
+          </a:xfrm>
+          <a:prstGeom prst="line">
+            <a:avLst/>
+          </a:prstGeom>
+          <a:ln w="3600">
+            <a:solidFill>
+              <a:srgbClr val="07774B"/>
+            </a:solidFill>
+          </a:ln>
+        </p:spPr>
+      </p:cxnSp>
+      <p:cxnSp>
+        <p:nvCxnSpPr>
+          <p:cNvPr id="34" name="Connector 33"/>
+          <p:cNvCxnSpPr/>
+          <p:nvPr/>
+        </p:nvCxnSpPr>
+        <p:spPr>
+          <a:xfrm>
+            <a:off x="2988000" y="1551600"/>
+            <a:ext cx="0" cy="64800"/>
+          </a:xfrm>
+          <a:prstGeom prst="line">
+            <a:avLst/>
+          </a:prstGeom>
+          <a:ln w="3600">
+            <a:solidFill>
+              <a:srgbClr val="07774B"/>
+            </a:solidFill>
+          </a:ln>
+        </p:spPr>
+      </p:cxnSp>
     </p:spTree>
   </p:cSld>
   <p:clrMapOvr>
@@ -3535,248 +4157,184 @@
         <p:nvPr/>
       </p:nvGrpSpPr>
       <p:grpSpPr/>
-      <p:sp>
-        <p:nvSpPr>
-          <p:cNvPr id="2" name="Freeform 1"/>
-          <p:cNvSpPr/>
+      <p:cxnSp>
+        <p:nvCxnSpPr>
+          <p:cNvPr id="2" name="Connector 1"/>
+          <p:cNvCxnSpPr/>
           <p:nvPr/>
-        </p:nvSpPr>
-        <p:spPr>
-          <a:xfrm>
-            <a:off x="0" y="0"/>
-            <a:ext cx="1080000" cy="1080000"/>
-          </a:xfrm>
-          <a:custGeom>
-            <a:avLst/>
-            <a:gdLst/>
-            <a:ahLst/>
-            <a:cxnLst/>
-            <a:rect l="l" t="t" r="r" b="b"/>
-            <a:pathLst>
-              <a:path w="1080000" h="1080000">
-                <a:moveTo>
-                  <a:pt x="0" y="0"/>
-                </a:moveTo>
-                <a:lnTo>
-                  <a:pt x="1080000" y="0"/>
-                </a:lnTo>
-                <a:lnTo>
-                  <a:pt x="1077688" y="70635"/>
-                </a:lnTo>
-                <a:lnTo>
-                  <a:pt x="1070760" y="140968"/>
-                </a:lnTo>
-                <a:lnTo>
-                  <a:pt x="1059248" y="210698"/>
-                </a:lnTo>
-                <a:lnTo>
-                  <a:pt x="1043200" y="279525"/>
-                </a:lnTo>
-                <a:lnTo>
-                  <a:pt x="1022685" y="347155"/>
-                </a:lnTo>
-                <a:lnTo>
-                  <a:pt x="997790" y="413298"/>
-                </a:lnTo>
-                <a:lnTo>
-                  <a:pt x="968623" y="477672"/>
-                </a:lnTo>
-                <a:lnTo>
-                  <a:pt x="935307" y="540000"/>
-                </a:lnTo>
-                <a:lnTo>
-                  <a:pt x="897987" y="600016"/>
-                </a:lnTo>
-                <a:lnTo>
-                  <a:pt x="856822" y="657462"/>
-                </a:lnTo>
-                <a:lnTo>
-                  <a:pt x="811987" y="712093"/>
-                </a:lnTo>
-                <a:lnTo>
-                  <a:pt x="763675" y="763675"/>
-                </a:lnTo>
-                <a:lnTo>
-                  <a:pt x="712093" y="811987"/>
-                </a:lnTo>
-                <a:lnTo>
-                  <a:pt x="657462" y="856822"/>
-                </a:lnTo>
-                <a:lnTo>
-                  <a:pt x="600016" y="897987"/>
-                </a:lnTo>
-                <a:lnTo>
-                  <a:pt x="540000" y="935307"/>
-                </a:lnTo>
-                <a:lnTo>
-                  <a:pt x="477672" y="968623"/>
-                </a:lnTo>
-                <a:lnTo>
-                  <a:pt x="413298" y="997790"/>
-                </a:lnTo>
-                <a:lnTo>
-                  <a:pt x="347155" y="1022685"/>
-                </a:lnTo>
-                <a:lnTo>
-                  <a:pt x="279525" y="1043200"/>
-                </a:lnTo>
-                <a:lnTo>
-                  <a:pt x="210698" y="1059248"/>
-                </a:lnTo>
-                <a:lnTo>
-                  <a:pt x="140968" y="1070760"/>
-                </a:lnTo>
-                <a:lnTo>
-                  <a:pt x="70635" y="1077688"/>
-                </a:lnTo>
-                <a:lnTo>
-                  <a:pt x="0" y="1080000"/>
-                </a:lnTo>
-                <a:close/>
-              </a:path>
-            </a:pathLst>
-          </a:custGeom>
-          <a:solidFill>
-            <a:srgbClr val="00B86B"/>
-          </a:solidFill>
-          <a:ln>
-            <a:noFill/>
+        </p:nvCxnSpPr>
+        <p:spPr>
+          <a:xfrm>
+            <a:off x="79200" y="108000"/>
+            <a:ext cx="57600" cy="0"/>
+          </a:xfrm>
+          <a:prstGeom prst="line">
+            <a:avLst/>
+          </a:prstGeom>
+          <a:ln w="3600">
+            <a:solidFill>
+              <a:srgbClr val="DCDFE4"/>
+            </a:solidFill>
           </a:ln>
         </p:spPr>
-        <p:txBody>
-          <a:bodyPr rtlCol="0" anchor="ctr"/>
-          <a:lstStyle/>
-          <a:p>
-            <a:pPr algn="ctr"/>
-          </a:p>
-        </p:txBody>
-      </p:sp>
-      <p:sp>
-        <p:nvSpPr>
-          <p:cNvPr id="3" name="Freeform 2"/>
-          <p:cNvSpPr/>
+      </p:cxnSp>
+      <p:cxnSp>
+        <p:nvCxnSpPr>
+          <p:cNvPr id="3" name="Connector 2"/>
+          <p:cNvCxnSpPr/>
           <p:nvPr/>
-        </p:nvSpPr>
-        <p:spPr>
-          <a:xfrm>
-            <a:off x="0" y="0"/>
-            <a:ext cx="684000" cy="684000"/>
-          </a:xfrm>
-          <a:custGeom>
-            <a:avLst/>
-            <a:gdLst/>
-            <a:ahLst/>
-            <a:cxnLst/>
-            <a:rect l="l" t="t" r="r" b="b"/>
-            <a:pathLst>
-              <a:path w="684000" h="684000">
-                <a:moveTo>
-                  <a:pt x="0" y="0"/>
-                </a:moveTo>
-                <a:lnTo>
-                  <a:pt x="684000" y="0"/>
-                </a:lnTo>
-                <a:lnTo>
-                  <a:pt x="682536" y="44736"/>
-                </a:lnTo>
-                <a:lnTo>
-                  <a:pt x="678148" y="89280"/>
-                </a:lnTo>
-                <a:lnTo>
-                  <a:pt x="670857" y="133442"/>
-                </a:lnTo>
-                <a:lnTo>
-                  <a:pt x="660693" y="177032"/>
-                </a:lnTo>
-                <a:lnTo>
-                  <a:pt x="647700" y="219865"/>
-                </a:lnTo>
-                <a:lnTo>
-                  <a:pt x="631934" y="261755"/>
-                </a:lnTo>
-                <a:lnTo>
-                  <a:pt x="613461" y="302525"/>
-                </a:lnTo>
-                <a:lnTo>
-                  <a:pt x="592361" y="342000"/>
-                </a:lnTo>
-                <a:lnTo>
-                  <a:pt x="568725" y="380010"/>
-                </a:lnTo>
-                <a:lnTo>
-                  <a:pt x="542654" y="416393"/>
-                </a:lnTo>
-                <a:lnTo>
-                  <a:pt x="514258" y="450993"/>
-                </a:lnTo>
-                <a:lnTo>
-                  <a:pt x="483661" y="483661"/>
-                </a:lnTo>
-                <a:lnTo>
-                  <a:pt x="450993" y="514258"/>
-                </a:lnTo>
-                <a:lnTo>
-                  <a:pt x="416393" y="542654"/>
-                </a:lnTo>
-                <a:lnTo>
-                  <a:pt x="380010" y="568725"/>
-                </a:lnTo>
-                <a:lnTo>
-                  <a:pt x="342000" y="592361"/>
-                </a:lnTo>
-                <a:lnTo>
-                  <a:pt x="302525" y="613461"/>
-                </a:lnTo>
-                <a:lnTo>
-                  <a:pt x="261755" y="631934"/>
-                </a:lnTo>
-                <a:lnTo>
-                  <a:pt x="219865" y="647700"/>
-                </a:lnTo>
-                <a:lnTo>
-                  <a:pt x="177032" y="660693"/>
-                </a:lnTo>
-                <a:lnTo>
-                  <a:pt x="133442" y="670857"/>
-                </a:lnTo>
-                <a:lnTo>
-                  <a:pt x="89280" y="678148"/>
-                </a:lnTo>
-                <a:lnTo>
-                  <a:pt x="44736" y="682536"/>
-                </a:lnTo>
-                <a:lnTo>
-                  <a:pt x="0" y="684000"/>
-                </a:lnTo>
-                <a:close/>
-              </a:path>
-            </a:pathLst>
-          </a:custGeom>
-          <a:solidFill>
-            <a:srgbClr val="D1ECE3"/>
-          </a:solidFill>
-          <a:ln>
-            <a:noFill/>
+        </p:nvCxnSpPr>
+        <p:spPr>
+          <a:xfrm>
+            <a:off x="108000" y="79200"/>
+            <a:ext cx="0" cy="57600"/>
+          </a:xfrm>
+          <a:prstGeom prst="line">
+            <a:avLst/>
+          </a:prstGeom>
+          <a:ln w="3600">
+            <a:solidFill>
+              <a:srgbClr val="DCDFE4"/>
+            </a:solidFill>
           </a:ln>
         </p:spPr>
-        <p:txBody>
-          <a:bodyPr rtlCol="0" anchor="ctr"/>
-          <a:lstStyle/>
-          <a:p>
-            <a:pPr algn="ctr"/>
-          </a:p>
-        </p:txBody>
-      </p:sp>
-      <p:sp>
-        <p:nvSpPr>
-          <p:cNvPr id="4" name="텍스트"/>
+      </p:cxnSp>
+      <p:cxnSp>
+        <p:nvCxnSpPr>
+          <p:cNvPr id="4" name="Connector 3"/>
+          <p:cNvCxnSpPr/>
+          <p:nvPr/>
+        </p:nvCxnSpPr>
+        <p:spPr>
+          <a:xfrm>
+            <a:off x="3103200" y="108000"/>
+            <a:ext cx="57600" cy="0"/>
+          </a:xfrm>
+          <a:prstGeom prst="line">
+            <a:avLst/>
+          </a:prstGeom>
+          <a:ln w="3600">
+            <a:solidFill>
+              <a:srgbClr val="DCDFE4"/>
+            </a:solidFill>
+          </a:ln>
+        </p:spPr>
+      </p:cxnSp>
+      <p:cxnSp>
+        <p:nvCxnSpPr>
+          <p:cNvPr id="5" name="Connector 4"/>
+          <p:cNvCxnSpPr/>
+          <p:nvPr/>
+        </p:nvCxnSpPr>
+        <p:spPr>
+          <a:xfrm>
+            <a:off x="3132000" y="79200"/>
+            <a:ext cx="0" cy="57600"/>
+          </a:xfrm>
+          <a:prstGeom prst="line">
+            <a:avLst/>
+          </a:prstGeom>
+          <a:ln w="3600">
+            <a:solidFill>
+              <a:srgbClr val="DCDFE4"/>
+            </a:solidFill>
+          </a:ln>
+        </p:spPr>
+      </p:cxnSp>
+      <p:cxnSp>
+        <p:nvCxnSpPr>
+          <p:cNvPr id="6" name="Connector 5"/>
+          <p:cNvCxnSpPr/>
+          <p:nvPr/>
+        </p:nvCxnSpPr>
+        <p:spPr>
+          <a:xfrm>
+            <a:off x="79200" y="1692000"/>
+            <a:ext cx="57600" cy="0"/>
+          </a:xfrm>
+          <a:prstGeom prst="line">
+            <a:avLst/>
+          </a:prstGeom>
+          <a:ln w="3600">
+            <a:solidFill>
+              <a:srgbClr val="DCDFE4"/>
+            </a:solidFill>
+          </a:ln>
+        </p:spPr>
+      </p:cxnSp>
+      <p:cxnSp>
+        <p:nvCxnSpPr>
+          <p:cNvPr id="7" name="Connector 6"/>
+          <p:cNvCxnSpPr/>
+          <p:nvPr/>
+        </p:nvCxnSpPr>
+        <p:spPr>
+          <a:xfrm>
+            <a:off x="108000" y="1663200"/>
+            <a:ext cx="0" cy="57600"/>
+          </a:xfrm>
+          <a:prstGeom prst="line">
+            <a:avLst/>
+          </a:prstGeom>
+          <a:ln w="3600">
+            <a:solidFill>
+              <a:srgbClr val="DCDFE4"/>
+            </a:solidFill>
+          </a:ln>
+        </p:spPr>
+      </p:cxnSp>
+      <p:cxnSp>
+        <p:nvCxnSpPr>
+          <p:cNvPr id="8" name="Connector 7"/>
+          <p:cNvCxnSpPr/>
+          <p:nvPr/>
+        </p:nvCxnSpPr>
+        <p:spPr>
+          <a:xfrm>
+            <a:off x="3103200" y="1692000"/>
+            <a:ext cx="57600" cy="0"/>
+          </a:xfrm>
+          <a:prstGeom prst="line">
+            <a:avLst/>
+          </a:prstGeom>
+          <a:ln w="3600">
+            <a:solidFill>
+              <a:srgbClr val="DCDFE4"/>
+            </a:solidFill>
+          </a:ln>
+        </p:spPr>
+      </p:cxnSp>
+      <p:cxnSp>
+        <p:nvCxnSpPr>
+          <p:cNvPr id="9" name="Connector 8"/>
+          <p:cNvCxnSpPr/>
+          <p:nvPr/>
+        </p:nvCxnSpPr>
+        <p:spPr>
+          <a:xfrm>
+            <a:off x="3132000" y="1663200"/>
+            <a:ext cx="0" cy="57600"/>
+          </a:xfrm>
+          <a:prstGeom prst="line">
+            <a:avLst/>
+          </a:prstGeom>
+          <a:ln w="3600">
+            <a:solidFill>
+              <a:srgbClr val="DCDFE4"/>
+            </a:solidFill>
+          </a:ln>
+        </p:spPr>
+      </p:cxnSp>
+      <p:sp>
+        <p:nvSpPr>
+          <p:cNvPr id="10" name="텍스트"/>
           <p:cNvSpPr txBox="1"/>
           <p:nvPr/>
         </p:nvSpPr>
         <p:spPr>
           <a:xfrm>
-            <a:off x="1188000" y="1044000"/>
-            <a:ext cx="1800000" cy="432000"/>
+            <a:off x="252000" y="288000"/>
+            <a:ext cx="2520000" cy="123826"/>
           </a:xfrm>
           <a:prstGeom prst="rect">
             <a:avLst/>
@@ -3789,70 +4347,13 @@
           </a:bodyPr>
           <a:lstStyle/>
           <a:p>
-            <a:pPr algn="r">
-              <a:lnSpc>
-                <a:spcPts val="1739"/>
-              </a:lnSpc>
-            </a:pPr>
-            <a:r>
-              <a:rPr sz="1200" b="1">
-                <a:solidFill>
-                  <a:srgbClr val="12151C"/>
-                </a:solidFill>
-                <a:latin typeface="맑은 고딕"/>
-                <a:ea typeface="맑은 고딕"/>
-              </a:rPr>
-              <a:t>일의 과정을 투명하게</a:t>
-            </a:r>
-          </a:p>
-          <a:p>
-            <a:pPr algn="r">
-              <a:lnSpc>
-                <a:spcPts val="1739"/>
-              </a:lnSpc>
-            </a:pPr>
-            <a:r>
-              <a:rPr sz="1200" b="1">
-                <a:solidFill>
-                  <a:srgbClr val="12151C"/>
-                </a:solidFill>
-                <a:latin typeface="맑은 고딕"/>
-                <a:ea typeface="맑은 고딕"/>
-              </a:rPr>
-              <a:t>보여 드립니다</a:t>
-            </a:r>
-          </a:p>
-        </p:txBody>
-      </p:sp>
-      <p:sp>
-        <p:nvSpPr>
-          <p:cNvPr id="5" name="텍스트"/>
-          <p:cNvSpPr txBox="1"/>
-          <p:nvPr/>
-        </p:nvSpPr>
-        <p:spPr>
-          <a:xfrm>
-            <a:off x="1188000" y="1526400"/>
-            <a:ext cx="1800000" cy="123826"/>
-          </a:xfrm>
-          <a:prstGeom prst="rect">
-            <a:avLst/>
-          </a:prstGeom>
-          <a:noFill/>
-        </p:spPr>
-        <p:txBody>
-          <a:bodyPr wrap="square" lIns="0" rIns="0" tIns="0" bIns="0" anchor="t">
-            <a:spAutoFit/>
-          </a:bodyPr>
-          <a:lstStyle/>
-          <a:p>
-            <a:pPr algn="r">
+            <a:pPr algn="ctr">
               <a:lnSpc>
                 <a:spcPts val="942"/>
               </a:lnSpc>
             </a:pPr>
             <a:r>
-              <a:rPr sz="650" b="1" spc="200">
+              <a:rPr sz="650" b="1" spc="220">
                 <a:solidFill>
                   <a:srgbClr val="6B7280"/>
                 </a:solidFill>
@@ -3860,6 +4361,237 @@
                 <a:ea typeface="맑은 고딕"/>
               </a:rPr>
               <a:t>소속 · 브랜드</a:t>
+            </a:r>
+          </a:p>
+        </p:txBody>
+      </p:sp>
+      <p:sp>
+        <p:nvSpPr>
+          <p:cNvPr id="11" name="Rectangle 10"/>
+          <p:cNvSpPr/>
+          <p:nvPr/>
+        </p:nvSpPr>
+        <p:spPr>
+          <a:xfrm>
+            <a:off x="1530000" y="453600"/>
+            <a:ext cx="180000" cy="14400"/>
+          </a:xfrm>
+          <a:prstGeom prst="rect">
+            <a:avLst/>
+          </a:prstGeom>
+          <a:solidFill>
+            <a:srgbClr val="00B86B"/>
+          </a:solidFill>
+          <a:ln>
+            <a:noFill/>
+          </a:ln>
+        </p:spPr>
+        <p:txBody>
+          <a:bodyPr rtlCol="0" anchor="ctr"/>
+          <a:lstStyle/>
+          <a:p>
+            <a:pPr algn="ctr"/>
+          </a:p>
+        </p:txBody>
+      </p:sp>
+      <p:sp>
+        <p:nvSpPr>
+          <p:cNvPr id="12" name="텍스트"/>
+          <p:cNvSpPr txBox="1"/>
+          <p:nvPr/>
+        </p:nvSpPr>
+        <p:spPr>
+          <a:xfrm>
+            <a:off x="360000" y="619200"/>
+            <a:ext cx="2520000" cy="99061"/>
+          </a:xfrm>
+          <a:prstGeom prst="rect">
+            <a:avLst/>
+          </a:prstGeom>
+          <a:noFill/>
+        </p:spPr>
+        <p:txBody>
+          <a:bodyPr wrap="square" lIns="0" rIns="0" tIns="0" bIns="0" anchor="t">
+            <a:spAutoFit/>
+          </a:bodyPr>
+          <a:lstStyle/>
+          <a:p>
+            <a:pPr algn="ctr">
+              <a:lnSpc>
+                <a:spcPts val="754"/>
+              </a:lnSpc>
+            </a:pPr>
+            <a:r>
+              <a:rPr sz="520" b="1" spc="240">
+                <a:solidFill>
+                  <a:srgbClr val="6B7280"/>
+                </a:solidFill>
+                <a:latin typeface="맑은 고딕"/>
+                <a:ea typeface="맑은 고딕"/>
+              </a:rPr>
+              <a:t>전문 분야</a:t>
+            </a:r>
+          </a:p>
+        </p:txBody>
+      </p:sp>
+      <p:sp>
+        <p:nvSpPr>
+          <p:cNvPr id="13" name="텍스트"/>
+          <p:cNvSpPr txBox="1"/>
+          <p:nvPr/>
+        </p:nvSpPr>
+        <p:spPr>
+          <a:xfrm>
+            <a:off x="360000" y="741600"/>
+            <a:ext cx="2520000" cy="396000"/>
+          </a:xfrm>
+          <a:prstGeom prst="rect">
+            <a:avLst/>
+          </a:prstGeom>
+          <a:noFill/>
+        </p:spPr>
+        <p:txBody>
+          <a:bodyPr wrap="square" lIns="0" rIns="0" tIns="0" bIns="0" anchor="t">
+            <a:spAutoFit/>
+          </a:bodyPr>
+          <a:lstStyle/>
+          <a:p>
+            <a:pPr algn="ctr">
+              <a:lnSpc>
+                <a:spcPts val="1188"/>
+              </a:lnSpc>
+            </a:pPr>
+            <a:r>
+              <a:rPr sz="819" b="1">
+                <a:solidFill>
+                  <a:srgbClr val="12151C"/>
+                </a:solidFill>
+                <a:latin typeface="맑은 고딕"/>
+                <a:ea typeface="맑은 고딕"/>
+              </a:rPr>
+              <a:t>통역  ·  데이터 분석  ·  원고 집필  ·  자문</a:t>
+            </a:r>
+          </a:p>
+        </p:txBody>
+      </p:sp>
+      <p:cxnSp>
+        <p:nvCxnSpPr>
+          <p:cNvPr id="14" name="Connector 13"/>
+          <p:cNvCxnSpPr/>
+          <p:nvPr/>
+        </p:nvCxnSpPr>
+        <p:spPr>
+          <a:xfrm>
+            <a:off x="360000" y="1224000"/>
+            <a:ext cx="2520000" cy="0"/>
+          </a:xfrm>
+          <a:prstGeom prst="line">
+            <a:avLst/>
+          </a:prstGeom>
+          <a:ln w="3600">
+            <a:solidFill>
+              <a:srgbClr val="DCDFE4"/>
+            </a:solidFill>
+          </a:ln>
+        </p:spPr>
+      </p:cxnSp>
+      <p:sp>
+        <p:nvSpPr>
+          <p:cNvPr id="15" name="텍스트"/>
+          <p:cNvSpPr txBox="1"/>
+          <p:nvPr/>
+        </p:nvSpPr>
+        <p:spPr>
+          <a:xfrm>
+            <a:off x="360000" y="1317600"/>
+            <a:ext cx="1224000" cy="118111"/>
+          </a:xfrm>
+          <a:prstGeom prst="rect">
+            <a:avLst/>
+          </a:prstGeom>
+          <a:noFill/>
+        </p:spPr>
+        <p:txBody>
+          <a:bodyPr wrap="square" lIns="0" rIns="0" tIns="0" bIns="0" anchor="t">
+            <a:spAutoFit/>
+          </a:bodyPr>
+          <a:lstStyle/>
+          <a:p>
+            <a:pPr algn="ctr">
+              <a:lnSpc>
+                <a:spcPts val="899"/>
+              </a:lnSpc>
+            </a:pPr>
+            <a:r>
+              <a:rPr sz="620" b="0">
+                <a:solidFill>
+                  <a:srgbClr val="12151C"/>
+                </a:solidFill>
+                <a:latin typeface="맑은 고딕"/>
+                <a:ea typeface="맑은 고딕"/>
+              </a:rPr>
+              <a:t>메일 · 메시지 문의</a:t>
+            </a:r>
+          </a:p>
+        </p:txBody>
+      </p:sp>
+      <p:cxnSp>
+        <p:nvCxnSpPr>
+          <p:cNvPr id="16" name="Connector 15"/>
+          <p:cNvCxnSpPr/>
+          <p:nvPr/>
+        </p:nvCxnSpPr>
+        <p:spPr>
+          <a:xfrm>
+            <a:off x="1620000" y="1296000"/>
+            <a:ext cx="0" cy="180000"/>
+          </a:xfrm>
+          <a:prstGeom prst="line">
+            <a:avLst/>
+          </a:prstGeom>
+          <a:ln w="3600">
+            <a:solidFill>
+              <a:srgbClr val="DCDFE4"/>
+            </a:solidFill>
+          </a:ln>
+        </p:spPr>
+      </p:cxnSp>
+      <p:sp>
+        <p:nvSpPr>
+          <p:cNvPr id="17" name="텍스트"/>
+          <p:cNvSpPr txBox="1"/>
+          <p:nvPr/>
+        </p:nvSpPr>
+        <p:spPr>
+          <a:xfrm>
+            <a:off x="1656000" y="1317600"/>
+            <a:ext cx="1224000" cy="118111"/>
+          </a:xfrm>
+          <a:prstGeom prst="rect">
+            <a:avLst/>
+          </a:prstGeom>
+          <a:noFill/>
+        </p:spPr>
+        <p:txBody>
+          <a:bodyPr wrap="square" lIns="0" rIns="0" tIns="0" bIns="0" anchor="t">
+            <a:spAutoFit/>
+          </a:bodyPr>
+          <a:lstStyle/>
+          <a:p>
+            <a:pPr algn="ctr">
+              <a:lnSpc>
+                <a:spcPts val="899"/>
+              </a:lnSpc>
+            </a:pPr>
+            <a:r>
+              <a:rPr sz="620" b="0">
+                <a:solidFill>
+                  <a:srgbClr val="12151C"/>
+                </a:solidFill>
+                <a:latin typeface="맑은 고딕"/>
+                <a:ea typeface="맑은 고딕"/>
+              </a:rPr>
+              <a:t>@아이디</a:t>
             </a:r>
           </a:p>
         </p:txBody>
